--- a/生命活水充滿我(崇拜版).pptx
+++ b/生命活水充滿我(崇拜版).pptx
@@ -169,10 +169,9 @@
           <a:lstStyle/>
           <a:p>
             <a:r>
-              <a:rPr lang="zh-TW" altLang="en-US" smtClean="0"/>
+              <a:rPr lang="zh-TW" altLang="en-US"/>
               <a:t>按一下以編輯母片標題樣式</a:t>
             </a:r>
-            <a:endParaRPr lang="zh-TW" altLang="en-US"/>
           </a:p>
         </p:txBody>
       </p:sp>
@@ -288,10 +287,9 @@
           </a:lstStyle>
           <a:p>
             <a:r>
-              <a:rPr lang="zh-TW" altLang="en-US" smtClean="0"/>
+              <a:rPr lang="zh-TW" altLang="en-US"/>
               <a:t>按一下以編輯母片副標題樣式</a:t>
             </a:r>
-            <a:endParaRPr lang="zh-TW" altLang="en-US"/>
           </a:p>
         </p:txBody>
       </p:sp>
@@ -312,7 +310,7 @@
           <a:p>
             <a:fld id="{E7EB5438-4E41-4945-9B4C-F14A9608F7B9}" type="datetimeFigureOut">
               <a:rPr lang="zh-TW" altLang="en-US" smtClean="0"/>
-              <a:t>2020/10/24</a:t>
+              <a:t>2024/11/16</a:t>
             </a:fld>
             <a:endParaRPr lang="zh-TW" altLang="en-US"/>
           </a:p>
@@ -401,10 +399,9 @@
           <a:lstStyle/>
           <a:p>
             <a:r>
-              <a:rPr lang="zh-TW" altLang="en-US" smtClean="0"/>
+              <a:rPr lang="zh-TW" altLang="en-US"/>
               <a:t>按一下以編輯母片標題樣式</a:t>
             </a:r>
-            <a:endParaRPr lang="zh-TW" altLang="en-US"/>
           </a:p>
         </p:txBody>
       </p:sp>
@@ -425,38 +422,37 @@
           <a:p>
             <a:pPr lvl="0"/>
             <a:r>
-              <a:rPr lang="zh-TW" altLang="en-US" smtClean="0"/>
+              <a:rPr lang="zh-TW" altLang="en-US"/>
               <a:t>按一下以編輯母片文字樣式</a:t>
             </a:r>
           </a:p>
           <a:p>
             <a:pPr lvl="1"/>
             <a:r>
-              <a:rPr lang="zh-TW" altLang="en-US" smtClean="0"/>
+              <a:rPr lang="zh-TW" altLang="en-US"/>
               <a:t>第二層</a:t>
             </a:r>
           </a:p>
           <a:p>
             <a:pPr lvl="2"/>
             <a:r>
-              <a:rPr lang="zh-TW" altLang="en-US" smtClean="0"/>
+              <a:rPr lang="zh-TW" altLang="en-US"/>
               <a:t>第三層</a:t>
             </a:r>
           </a:p>
           <a:p>
             <a:pPr lvl="3"/>
             <a:r>
-              <a:rPr lang="zh-TW" altLang="en-US" smtClean="0"/>
+              <a:rPr lang="zh-TW" altLang="en-US"/>
               <a:t>第四層</a:t>
             </a:r>
           </a:p>
           <a:p>
             <a:pPr lvl="4"/>
             <a:r>
-              <a:rPr lang="zh-TW" altLang="en-US" smtClean="0"/>
+              <a:rPr lang="zh-TW" altLang="en-US"/>
               <a:t>第五層</a:t>
             </a:r>
-            <a:endParaRPr lang="zh-TW" altLang="en-US"/>
           </a:p>
         </p:txBody>
       </p:sp>
@@ -477,7 +473,7 @@
           <a:p>
             <a:fld id="{E7EB5438-4E41-4945-9B4C-F14A9608F7B9}" type="datetimeFigureOut">
               <a:rPr lang="zh-TW" altLang="en-US" smtClean="0"/>
-              <a:t>2020/10/24</a:t>
+              <a:t>2024/11/16</a:t>
             </a:fld>
             <a:endParaRPr lang="zh-TW" altLang="en-US"/>
           </a:p>
@@ -571,10 +567,9 @@
           <a:lstStyle/>
           <a:p>
             <a:r>
-              <a:rPr lang="zh-TW" altLang="en-US" smtClean="0"/>
+              <a:rPr lang="zh-TW" altLang="en-US"/>
               <a:t>按一下以編輯母片標題樣式</a:t>
             </a:r>
-            <a:endParaRPr lang="zh-TW" altLang="en-US"/>
           </a:p>
         </p:txBody>
       </p:sp>
@@ -600,38 +595,37 @@
           <a:p>
             <a:pPr lvl="0"/>
             <a:r>
-              <a:rPr lang="zh-TW" altLang="en-US" smtClean="0"/>
+              <a:rPr lang="zh-TW" altLang="en-US"/>
               <a:t>按一下以編輯母片文字樣式</a:t>
             </a:r>
           </a:p>
           <a:p>
             <a:pPr lvl="1"/>
             <a:r>
-              <a:rPr lang="zh-TW" altLang="en-US" smtClean="0"/>
+              <a:rPr lang="zh-TW" altLang="en-US"/>
               <a:t>第二層</a:t>
             </a:r>
           </a:p>
           <a:p>
             <a:pPr lvl="2"/>
             <a:r>
-              <a:rPr lang="zh-TW" altLang="en-US" smtClean="0"/>
+              <a:rPr lang="zh-TW" altLang="en-US"/>
               <a:t>第三層</a:t>
             </a:r>
           </a:p>
           <a:p>
             <a:pPr lvl="3"/>
             <a:r>
-              <a:rPr lang="zh-TW" altLang="en-US" smtClean="0"/>
+              <a:rPr lang="zh-TW" altLang="en-US"/>
               <a:t>第四層</a:t>
             </a:r>
           </a:p>
           <a:p>
             <a:pPr lvl="4"/>
             <a:r>
-              <a:rPr lang="zh-TW" altLang="en-US" smtClean="0"/>
+              <a:rPr lang="zh-TW" altLang="en-US"/>
               <a:t>第五層</a:t>
             </a:r>
-            <a:endParaRPr lang="zh-TW" altLang="en-US"/>
           </a:p>
         </p:txBody>
       </p:sp>
@@ -652,7 +646,7 @@
           <a:p>
             <a:fld id="{E7EB5438-4E41-4945-9B4C-F14A9608F7B9}" type="datetimeFigureOut">
               <a:rPr lang="zh-TW" altLang="en-US" smtClean="0"/>
-              <a:t>2020/10/24</a:t>
+              <a:t>2024/11/16</a:t>
             </a:fld>
             <a:endParaRPr lang="zh-TW" altLang="en-US"/>
           </a:p>
@@ -741,10 +735,9 @@
           <a:lstStyle/>
           <a:p>
             <a:r>
-              <a:rPr lang="zh-TW" altLang="en-US" smtClean="0"/>
+              <a:rPr lang="zh-TW" altLang="en-US"/>
               <a:t>按一下以編輯母片標題樣式</a:t>
             </a:r>
-            <a:endParaRPr lang="zh-TW" altLang="en-US"/>
           </a:p>
         </p:txBody>
       </p:sp>
@@ -765,38 +758,37 @@
           <a:p>
             <a:pPr lvl="0"/>
             <a:r>
-              <a:rPr lang="zh-TW" altLang="en-US" smtClean="0"/>
+              <a:rPr lang="zh-TW" altLang="en-US"/>
               <a:t>按一下以編輯母片文字樣式</a:t>
             </a:r>
           </a:p>
           <a:p>
             <a:pPr lvl="1"/>
             <a:r>
-              <a:rPr lang="zh-TW" altLang="en-US" smtClean="0"/>
+              <a:rPr lang="zh-TW" altLang="en-US"/>
               <a:t>第二層</a:t>
             </a:r>
           </a:p>
           <a:p>
             <a:pPr lvl="2"/>
             <a:r>
-              <a:rPr lang="zh-TW" altLang="en-US" smtClean="0"/>
+              <a:rPr lang="zh-TW" altLang="en-US"/>
               <a:t>第三層</a:t>
             </a:r>
           </a:p>
           <a:p>
             <a:pPr lvl="3"/>
             <a:r>
-              <a:rPr lang="zh-TW" altLang="en-US" smtClean="0"/>
+              <a:rPr lang="zh-TW" altLang="en-US"/>
               <a:t>第四層</a:t>
             </a:r>
           </a:p>
           <a:p>
             <a:pPr lvl="4"/>
             <a:r>
-              <a:rPr lang="zh-TW" altLang="en-US" smtClean="0"/>
+              <a:rPr lang="zh-TW" altLang="en-US"/>
               <a:t>第五層</a:t>
             </a:r>
-            <a:endParaRPr lang="zh-TW" altLang="en-US"/>
           </a:p>
         </p:txBody>
       </p:sp>
@@ -817,7 +809,7 @@
           <a:p>
             <a:fld id="{E7EB5438-4E41-4945-9B4C-F14A9608F7B9}" type="datetimeFigureOut">
               <a:rPr lang="zh-TW" altLang="en-US" smtClean="0"/>
-              <a:t>2020/10/24</a:t>
+              <a:t>2024/11/16</a:t>
             </a:fld>
             <a:endParaRPr lang="zh-TW" altLang="en-US"/>
           </a:p>
@@ -915,10 +907,9 @@
           </a:lstStyle>
           <a:p>
             <a:r>
-              <a:rPr lang="zh-TW" altLang="en-US" smtClean="0"/>
+              <a:rPr lang="zh-TW" altLang="en-US"/>
               <a:t>按一下以編輯母片標題樣式</a:t>
             </a:r>
-            <a:endParaRPr lang="zh-TW" altLang="en-US"/>
           </a:p>
         </p:txBody>
       </p:sp>
@@ -1035,7 +1026,7 @@
           <a:p>
             <a:pPr lvl="0"/>
             <a:r>
-              <a:rPr lang="zh-TW" altLang="en-US" smtClean="0"/>
+              <a:rPr lang="zh-TW" altLang="en-US"/>
               <a:t>按一下以編輯母片文字樣式</a:t>
             </a:r>
           </a:p>
@@ -1058,7 +1049,7 @@
           <a:p>
             <a:fld id="{E7EB5438-4E41-4945-9B4C-F14A9608F7B9}" type="datetimeFigureOut">
               <a:rPr lang="zh-TW" altLang="en-US" smtClean="0"/>
-              <a:t>2020/10/24</a:t>
+              <a:t>2024/11/16</a:t>
             </a:fld>
             <a:endParaRPr lang="zh-TW" altLang="en-US"/>
           </a:p>
@@ -1147,10 +1138,9 @@
           <a:lstStyle/>
           <a:p>
             <a:r>
-              <a:rPr lang="zh-TW" altLang="en-US" smtClean="0"/>
+              <a:rPr lang="zh-TW" altLang="en-US"/>
               <a:t>按一下以編輯母片標題樣式</a:t>
             </a:r>
-            <a:endParaRPr lang="zh-TW" altLang="en-US"/>
           </a:p>
         </p:txBody>
       </p:sp>
@@ -1204,38 +1194,37 @@
           <a:p>
             <a:pPr lvl="0"/>
             <a:r>
-              <a:rPr lang="zh-TW" altLang="en-US" smtClean="0"/>
+              <a:rPr lang="zh-TW" altLang="en-US"/>
               <a:t>按一下以編輯母片文字樣式</a:t>
             </a:r>
           </a:p>
           <a:p>
             <a:pPr lvl="1"/>
             <a:r>
-              <a:rPr lang="zh-TW" altLang="en-US" smtClean="0"/>
+              <a:rPr lang="zh-TW" altLang="en-US"/>
               <a:t>第二層</a:t>
             </a:r>
           </a:p>
           <a:p>
             <a:pPr lvl="2"/>
             <a:r>
-              <a:rPr lang="zh-TW" altLang="en-US" smtClean="0"/>
+              <a:rPr lang="zh-TW" altLang="en-US"/>
               <a:t>第三層</a:t>
             </a:r>
           </a:p>
           <a:p>
             <a:pPr lvl="3"/>
             <a:r>
-              <a:rPr lang="zh-TW" altLang="en-US" smtClean="0"/>
+              <a:rPr lang="zh-TW" altLang="en-US"/>
               <a:t>第四層</a:t>
             </a:r>
           </a:p>
           <a:p>
             <a:pPr lvl="4"/>
             <a:r>
-              <a:rPr lang="zh-TW" altLang="en-US" smtClean="0"/>
+              <a:rPr lang="zh-TW" altLang="en-US"/>
               <a:t>第五層</a:t>
             </a:r>
-            <a:endParaRPr lang="zh-TW" altLang="en-US"/>
           </a:p>
         </p:txBody>
       </p:sp>
@@ -1289,38 +1278,37 @@
           <a:p>
             <a:pPr lvl="0"/>
             <a:r>
-              <a:rPr lang="zh-TW" altLang="en-US" smtClean="0"/>
+              <a:rPr lang="zh-TW" altLang="en-US"/>
               <a:t>按一下以編輯母片文字樣式</a:t>
             </a:r>
           </a:p>
           <a:p>
             <a:pPr lvl="1"/>
             <a:r>
-              <a:rPr lang="zh-TW" altLang="en-US" smtClean="0"/>
+              <a:rPr lang="zh-TW" altLang="en-US"/>
               <a:t>第二層</a:t>
             </a:r>
           </a:p>
           <a:p>
             <a:pPr lvl="2"/>
             <a:r>
-              <a:rPr lang="zh-TW" altLang="en-US" smtClean="0"/>
+              <a:rPr lang="zh-TW" altLang="en-US"/>
               <a:t>第三層</a:t>
             </a:r>
           </a:p>
           <a:p>
             <a:pPr lvl="3"/>
             <a:r>
-              <a:rPr lang="zh-TW" altLang="en-US" smtClean="0"/>
+              <a:rPr lang="zh-TW" altLang="en-US"/>
               <a:t>第四層</a:t>
             </a:r>
           </a:p>
           <a:p>
             <a:pPr lvl="4"/>
             <a:r>
-              <a:rPr lang="zh-TW" altLang="en-US" smtClean="0"/>
+              <a:rPr lang="zh-TW" altLang="en-US"/>
               <a:t>第五層</a:t>
             </a:r>
-            <a:endParaRPr lang="zh-TW" altLang="en-US"/>
           </a:p>
         </p:txBody>
       </p:sp>
@@ -1341,7 +1329,7 @@
           <a:p>
             <a:fld id="{E7EB5438-4E41-4945-9B4C-F14A9608F7B9}" type="datetimeFigureOut">
               <a:rPr lang="zh-TW" altLang="en-US" smtClean="0"/>
-              <a:t>2020/10/24</a:t>
+              <a:t>2024/11/16</a:t>
             </a:fld>
             <a:endParaRPr lang="zh-TW" altLang="en-US"/>
           </a:p>
@@ -1434,10 +1422,9 @@
           </a:lstStyle>
           <a:p>
             <a:r>
-              <a:rPr lang="zh-TW" altLang="en-US" smtClean="0"/>
+              <a:rPr lang="zh-TW" altLang="en-US"/>
               <a:t>按一下以編輯母片標題樣式</a:t>
             </a:r>
-            <a:endParaRPr lang="zh-TW" altLang="en-US"/>
           </a:p>
         </p:txBody>
       </p:sp>
@@ -1500,7 +1487,7 @@
           <a:p>
             <a:pPr lvl="0"/>
             <a:r>
-              <a:rPr lang="zh-TW" altLang="en-US" smtClean="0"/>
+              <a:rPr lang="zh-TW" altLang="en-US"/>
               <a:t>按一下以編輯母片文字樣式</a:t>
             </a:r>
           </a:p>
@@ -1556,38 +1543,37 @@
           <a:p>
             <a:pPr lvl="0"/>
             <a:r>
-              <a:rPr lang="zh-TW" altLang="en-US" smtClean="0"/>
+              <a:rPr lang="zh-TW" altLang="en-US"/>
               <a:t>按一下以編輯母片文字樣式</a:t>
             </a:r>
           </a:p>
           <a:p>
             <a:pPr lvl="1"/>
             <a:r>
-              <a:rPr lang="zh-TW" altLang="en-US" smtClean="0"/>
+              <a:rPr lang="zh-TW" altLang="en-US"/>
               <a:t>第二層</a:t>
             </a:r>
           </a:p>
           <a:p>
             <a:pPr lvl="2"/>
             <a:r>
-              <a:rPr lang="zh-TW" altLang="en-US" smtClean="0"/>
+              <a:rPr lang="zh-TW" altLang="en-US"/>
               <a:t>第三層</a:t>
             </a:r>
           </a:p>
           <a:p>
             <a:pPr lvl="3"/>
             <a:r>
-              <a:rPr lang="zh-TW" altLang="en-US" smtClean="0"/>
+              <a:rPr lang="zh-TW" altLang="en-US"/>
               <a:t>第四層</a:t>
             </a:r>
           </a:p>
           <a:p>
             <a:pPr lvl="4"/>
             <a:r>
-              <a:rPr lang="zh-TW" altLang="en-US" smtClean="0"/>
+              <a:rPr lang="zh-TW" altLang="en-US"/>
               <a:t>第五層</a:t>
             </a:r>
-            <a:endParaRPr lang="zh-TW" altLang="en-US"/>
           </a:p>
         </p:txBody>
       </p:sp>
@@ -1650,7 +1636,7 @@
           <a:p>
             <a:pPr lvl="0"/>
             <a:r>
-              <a:rPr lang="zh-TW" altLang="en-US" smtClean="0"/>
+              <a:rPr lang="zh-TW" altLang="en-US"/>
               <a:t>按一下以編輯母片文字樣式</a:t>
             </a:r>
           </a:p>
@@ -1706,38 +1692,37 @@
           <a:p>
             <a:pPr lvl="0"/>
             <a:r>
-              <a:rPr lang="zh-TW" altLang="en-US" smtClean="0"/>
+              <a:rPr lang="zh-TW" altLang="en-US"/>
               <a:t>按一下以編輯母片文字樣式</a:t>
             </a:r>
           </a:p>
           <a:p>
             <a:pPr lvl="1"/>
             <a:r>
-              <a:rPr lang="zh-TW" altLang="en-US" smtClean="0"/>
+              <a:rPr lang="zh-TW" altLang="en-US"/>
               <a:t>第二層</a:t>
             </a:r>
           </a:p>
           <a:p>
             <a:pPr lvl="2"/>
             <a:r>
-              <a:rPr lang="zh-TW" altLang="en-US" smtClean="0"/>
+              <a:rPr lang="zh-TW" altLang="en-US"/>
               <a:t>第三層</a:t>
             </a:r>
           </a:p>
           <a:p>
             <a:pPr lvl="3"/>
             <a:r>
-              <a:rPr lang="zh-TW" altLang="en-US" smtClean="0"/>
+              <a:rPr lang="zh-TW" altLang="en-US"/>
               <a:t>第四層</a:t>
             </a:r>
           </a:p>
           <a:p>
             <a:pPr lvl="4"/>
             <a:r>
-              <a:rPr lang="zh-TW" altLang="en-US" smtClean="0"/>
+              <a:rPr lang="zh-TW" altLang="en-US"/>
               <a:t>第五層</a:t>
             </a:r>
-            <a:endParaRPr lang="zh-TW" altLang="en-US"/>
           </a:p>
         </p:txBody>
       </p:sp>
@@ -1758,7 +1743,7 @@
           <a:p>
             <a:fld id="{E7EB5438-4E41-4945-9B4C-F14A9608F7B9}" type="datetimeFigureOut">
               <a:rPr lang="zh-TW" altLang="en-US" smtClean="0"/>
-              <a:t>2020/10/24</a:t>
+              <a:t>2024/11/16</a:t>
             </a:fld>
             <a:endParaRPr lang="zh-TW" altLang="en-US"/>
           </a:p>
@@ -1847,10 +1832,9 @@
           <a:lstStyle/>
           <a:p>
             <a:r>
-              <a:rPr lang="zh-TW" altLang="en-US" smtClean="0"/>
+              <a:rPr lang="zh-TW" altLang="en-US"/>
               <a:t>按一下以編輯母片標題樣式</a:t>
             </a:r>
-            <a:endParaRPr lang="zh-TW" altLang="en-US"/>
           </a:p>
         </p:txBody>
       </p:sp>
@@ -1871,7 +1855,7 @@
           <a:p>
             <a:fld id="{E7EB5438-4E41-4945-9B4C-F14A9608F7B9}" type="datetimeFigureOut">
               <a:rPr lang="zh-TW" altLang="en-US" smtClean="0"/>
-              <a:t>2020/10/24</a:t>
+              <a:t>2024/11/16</a:t>
             </a:fld>
             <a:endParaRPr lang="zh-TW" altLang="en-US"/>
           </a:p>
@@ -1961,7 +1945,7 @@
           <a:p>
             <a:fld id="{E7EB5438-4E41-4945-9B4C-F14A9608F7B9}" type="datetimeFigureOut">
               <a:rPr lang="zh-TW" altLang="en-US" smtClean="0"/>
-              <a:t>2020/10/24</a:t>
+              <a:t>2024/11/16</a:t>
             </a:fld>
             <a:endParaRPr lang="zh-TW" altLang="en-US"/>
           </a:p>
@@ -2059,10 +2043,9 @@
           </a:lstStyle>
           <a:p>
             <a:r>
-              <a:rPr lang="zh-TW" altLang="en-US" smtClean="0"/>
+              <a:rPr lang="zh-TW" altLang="en-US"/>
               <a:t>按一下以編輯母片標題樣式</a:t>
             </a:r>
-            <a:endParaRPr lang="zh-TW" altLang="en-US"/>
           </a:p>
         </p:txBody>
       </p:sp>
@@ -2116,38 +2099,37 @@
           <a:p>
             <a:pPr lvl="0"/>
             <a:r>
-              <a:rPr lang="zh-TW" altLang="en-US" smtClean="0"/>
+              <a:rPr lang="zh-TW" altLang="en-US"/>
               <a:t>按一下以編輯母片文字樣式</a:t>
             </a:r>
           </a:p>
           <a:p>
             <a:pPr lvl="1"/>
             <a:r>
-              <a:rPr lang="zh-TW" altLang="en-US" smtClean="0"/>
+              <a:rPr lang="zh-TW" altLang="en-US"/>
               <a:t>第二層</a:t>
             </a:r>
           </a:p>
           <a:p>
             <a:pPr lvl="2"/>
             <a:r>
-              <a:rPr lang="zh-TW" altLang="en-US" smtClean="0"/>
+              <a:rPr lang="zh-TW" altLang="en-US"/>
               <a:t>第三層</a:t>
             </a:r>
           </a:p>
           <a:p>
             <a:pPr lvl="3"/>
             <a:r>
-              <a:rPr lang="zh-TW" altLang="en-US" smtClean="0"/>
+              <a:rPr lang="zh-TW" altLang="en-US"/>
               <a:t>第四層</a:t>
             </a:r>
           </a:p>
           <a:p>
             <a:pPr lvl="4"/>
             <a:r>
-              <a:rPr lang="zh-TW" altLang="en-US" smtClean="0"/>
+              <a:rPr lang="zh-TW" altLang="en-US"/>
               <a:t>第五層</a:t>
             </a:r>
-            <a:endParaRPr lang="zh-TW" altLang="en-US"/>
           </a:p>
         </p:txBody>
       </p:sp>
@@ -2210,7 +2192,7 @@
           <a:p>
             <a:pPr lvl="0"/>
             <a:r>
-              <a:rPr lang="zh-TW" altLang="en-US" smtClean="0"/>
+              <a:rPr lang="zh-TW" altLang="en-US"/>
               <a:t>按一下以編輯母片文字樣式</a:t>
             </a:r>
           </a:p>
@@ -2233,7 +2215,7 @@
           <a:p>
             <a:fld id="{E7EB5438-4E41-4945-9B4C-F14A9608F7B9}" type="datetimeFigureOut">
               <a:rPr lang="zh-TW" altLang="en-US" smtClean="0"/>
-              <a:t>2020/10/24</a:t>
+              <a:t>2024/11/16</a:t>
             </a:fld>
             <a:endParaRPr lang="zh-TW" altLang="en-US"/>
           </a:p>
@@ -2331,10 +2313,9 @@
           </a:lstStyle>
           <a:p>
             <a:r>
-              <a:rPr lang="zh-TW" altLang="en-US" smtClean="0"/>
+              <a:rPr lang="zh-TW" altLang="en-US"/>
               <a:t>按一下以編輯母片標題樣式</a:t>
             </a:r>
-            <a:endParaRPr lang="zh-TW" altLang="en-US"/>
           </a:p>
         </p:txBody>
       </p:sp>
@@ -2396,10 +2377,9 @@
           </a:lstStyle>
           <a:p>
             <a:r>
-              <a:rPr lang="zh-TW" altLang="en-US" smtClean="0"/>
+              <a:rPr lang="zh-TW" altLang="en-US"/>
               <a:t>按一下圖示以新增圖片</a:t>
             </a:r>
-            <a:endParaRPr lang="zh-TW" altLang="en-US"/>
           </a:p>
         </p:txBody>
       </p:sp>
@@ -2462,7 +2442,7 @@
           <a:p>
             <a:pPr lvl="0"/>
             <a:r>
-              <a:rPr lang="zh-TW" altLang="en-US" smtClean="0"/>
+              <a:rPr lang="zh-TW" altLang="en-US"/>
               <a:t>按一下以編輯母片文字樣式</a:t>
             </a:r>
           </a:p>
@@ -2485,7 +2465,7 @@
           <a:p>
             <a:fld id="{E7EB5438-4E41-4945-9B4C-F14A9608F7B9}" type="datetimeFigureOut">
               <a:rPr lang="zh-TW" altLang="en-US" smtClean="0"/>
-              <a:t>2020/10/24</a:t>
+              <a:t>2024/11/16</a:t>
             </a:fld>
             <a:endParaRPr lang="zh-TW" altLang="en-US"/>
           </a:p>
@@ -2594,10 +2574,9 @@
           <a:lstStyle/>
           <a:p>
             <a:r>
-              <a:rPr lang="zh-TW" altLang="en-US" smtClean="0"/>
+              <a:rPr lang="zh-TW" altLang="en-US"/>
               <a:t>按一下以編輯母片標題樣式</a:t>
             </a:r>
-            <a:endParaRPr lang="zh-TW" altLang="en-US"/>
           </a:p>
         </p:txBody>
       </p:sp>
@@ -2628,38 +2607,37 @@
           <a:p>
             <a:pPr lvl="0"/>
             <a:r>
-              <a:rPr lang="zh-TW" altLang="en-US" smtClean="0"/>
+              <a:rPr lang="zh-TW" altLang="en-US"/>
               <a:t>按一下以編輯母片文字樣式</a:t>
             </a:r>
           </a:p>
           <a:p>
             <a:pPr lvl="1"/>
             <a:r>
-              <a:rPr lang="zh-TW" altLang="en-US" smtClean="0"/>
+              <a:rPr lang="zh-TW" altLang="en-US"/>
               <a:t>第二層</a:t>
             </a:r>
           </a:p>
           <a:p>
             <a:pPr lvl="2"/>
             <a:r>
-              <a:rPr lang="zh-TW" altLang="en-US" smtClean="0"/>
+              <a:rPr lang="zh-TW" altLang="en-US"/>
               <a:t>第三層</a:t>
             </a:r>
           </a:p>
           <a:p>
             <a:pPr lvl="3"/>
             <a:r>
-              <a:rPr lang="zh-TW" altLang="en-US" smtClean="0"/>
+              <a:rPr lang="zh-TW" altLang="en-US"/>
               <a:t>第四層</a:t>
             </a:r>
           </a:p>
           <a:p>
             <a:pPr lvl="4"/>
             <a:r>
-              <a:rPr lang="zh-TW" altLang="en-US" smtClean="0"/>
+              <a:rPr lang="zh-TW" altLang="en-US"/>
               <a:t>第五層</a:t>
             </a:r>
-            <a:endParaRPr lang="zh-TW" altLang="en-US"/>
           </a:p>
         </p:txBody>
       </p:sp>
@@ -2698,7 +2676,7 @@
           <a:p>
             <a:fld id="{E7EB5438-4E41-4945-9B4C-F14A9608F7B9}" type="datetimeFigureOut">
               <a:rPr lang="zh-TW" altLang="en-US" smtClean="0"/>
-              <a:t>2020/10/24</a:t>
+              <a:t>2024/11/16</a:t>
             </a:fld>
             <a:endParaRPr lang="zh-TW" altLang="en-US"/>
           </a:p>
@@ -3105,24 +3083,7 @@
                 <a:latin typeface="微軟正黑體" pitchFamily="34" charset="-120"/>
                 <a:ea typeface="微軟正黑體" pitchFamily="34" charset="-120"/>
               </a:rPr>
-              <a:t>生</a:t>
-            </a:r>
-            <a:r>
-              <a:rPr lang="zh-TW" altLang="en-US" sz="7200" b="1" i="1" dirty="0">
-                <a:solidFill>
-                  <a:srgbClr val="660033"/>
-                </a:solidFill>
-                <a:effectLst>
-                  <a:outerShdw blurRad="38100" dist="38100" dir="2700000" algn="tl">
-                    <a:srgbClr val="000000">
-                      <a:alpha val="43137"/>
-                    </a:srgbClr>
-                  </a:outerShdw>
-                </a:effectLst>
-                <a:latin typeface="微軟正黑體" pitchFamily="34" charset="-120"/>
-                <a:ea typeface="微軟正黑體" pitchFamily="34" charset="-120"/>
-              </a:rPr>
-              <a:t>命活水充滿我</a:t>
+              <a:t>生命活水充滿我</a:t>
             </a:r>
           </a:p>
         </p:txBody>
@@ -3200,7 +3161,7 @@
                 <a:latin typeface="微軟正黑體" pitchFamily="34" charset="-120"/>
                 <a:ea typeface="微軟正黑體" pitchFamily="34" charset="-120"/>
               </a:rPr>
-              <a:t>袮</a:t>
+              <a:t>祢</a:t>
             </a:r>
             <a:r>
               <a:rPr lang="zh-TW" altLang="en-US" sz="6400" b="1" dirty="0">
@@ -3222,11 +3183,6 @@
               </a:rPr>
               <a:t>  </a:t>
             </a:r>
-          </a:p>
-          <a:p>
-            <a:pPr algn="ctr">
-              <a:buNone/>
-            </a:pPr>
             <a:r>
               <a:rPr lang="zh-TW" altLang="en-US" sz="6400" b="1" dirty="0">
                 <a:solidFill>
@@ -3237,12 +3193,73 @@
               </a:rPr>
               <a:t>是我藏身處</a:t>
             </a:r>
-            <a:endParaRPr lang="zh-TW" altLang="en-US" sz="6400" b="1" dirty="0">
+          </a:p>
+        </p:txBody>
+      </p:sp>
+      <p:sp>
+        <p:nvSpPr>
+          <p:cNvPr id="2" name="TextBox 1">
+            <a:extLst>
+              <a:ext uri="{FF2B5EF4-FFF2-40B4-BE49-F238E27FC236}">
+                <a16:creationId xmlns:a16="http://schemas.microsoft.com/office/drawing/2014/main" id="{52652EA3-C43B-7DB8-6950-40824E5C15F9}"/>
+              </a:ext>
+            </a:extLst>
+          </p:cNvPr>
+          <p:cNvSpPr txBox="1"/>
+          <p:nvPr/>
+        </p:nvSpPr>
+        <p:spPr>
+          <a:xfrm>
+            <a:off x="0" y="5085184"/>
+            <a:ext cx="12192000" cy="584775"/>
+          </a:xfrm>
+          <a:prstGeom prst="rect">
+            <a:avLst/>
+          </a:prstGeom>
+          <a:noFill/>
+        </p:spPr>
+        <p:txBody>
+          <a:bodyPr wrap="square" rtlCol="0">
+            <a:spAutoFit/>
+          </a:bodyPr>
+          <a:lstStyle/>
+          <a:p>
+            <a:pPr algn="ctr"/>
+            <a:r>
+              <a:rPr lang="en-US" sz="3200" b="1" dirty="0">
+                <a:solidFill>
+                  <a:srgbClr val="660033"/>
+                </a:solidFill>
+                <a:latin typeface="Microsoft JhengHei" panose="020B0604030504040204" pitchFamily="34" charset="-120"/>
+                <a:ea typeface="Microsoft JhengHei" panose="020B0604030504040204" pitchFamily="34" charset="-120"/>
+              </a:rPr>
+              <a:t>( </a:t>
+            </a:r>
+            <a:r>
+              <a:rPr lang="zh-CN" altLang="en-US" sz="3200" b="1" dirty="0">
+                <a:solidFill>
+                  <a:srgbClr val="660033"/>
+                </a:solidFill>
+                <a:latin typeface="Microsoft JhengHei" panose="020B0604030504040204" pitchFamily="34" charset="-120"/>
+                <a:ea typeface="Microsoft JhengHei" panose="020B0604030504040204" pitchFamily="34" charset="-120"/>
+              </a:rPr>
+              <a:t>正歌</a:t>
+            </a:r>
+            <a:r>
+              <a:rPr lang="en-US" sz="3200" b="1" dirty="0">
+                <a:solidFill>
+                  <a:srgbClr val="660033"/>
+                </a:solidFill>
+                <a:latin typeface="Microsoft JhengHei" panose="020B0604030504040204" pitchFamily="34" charset="-120"/>
+                <a:ea typeface="Microsoft JhengHei" panose="020B0604030504040204" pitchFamily="34" charset="-120"/>
+              </a:rPr>
+              <a:t> )</a:t>
+            </a:r>
+            <a:endParaRPr lang="vi-VN" sz="3200" b="1" dirty="0">
               <a:solidFill>
                 <a:srgbClr val="660033"/>
               </a:solidFill>
-              <a:latin typeface="微軟正黑體" pitchFamily="34" charset="-120"/>
-              <a:ea typeface="微軟正黑體" pitchFamily="34" charset="-120"/>
+              <a:ea typeface="Microsoft JhengHei" panose="020B0604030504040204" pitchFamily="34" charset="-120"/>
             </a:endParaRPr>
           </a:p>
         </p:txBody>
@@ -3310,7 +3327,7 @@
                 <a:latin typeface="微軟正黑體" pitchFamily="34" charset="-120"/>
                 <a:ea typeface="微軟正黑體" pitchFamily="34" charset="-120"/>
               </a:rPr>
-              <a:t>袮</a:t>
+              <a:t>祢</a:t>
             </a:r>
             <a:r>
               <a:rPr lang="zh-TW" altLang="en-US" sz="6400" b="1" dirty="0">
@@ -3344,12 +3361,73 @@
               </a:rPr>
               <a:t>四面來環繞我</a:t>
             </a:r>
-            <a:endParaRPr lang="zh-TW" altLang="en-US" sz="6400" b="1" dirty="0">
+          </a:p>
+        </p:txBody>
+      </p:sp>
+      <p:sp>
+        <p:nvSpPr>
+          <p:cNvPr id="2" name="TextBox 1">
+            <a:extLst>
+              <a:ext uri="{FF2B5EF4-FFF2-40B4-BE49-F238E27FC236}">
+                <a16:creationId xmlns:a16="http://schemas.microsoft.com/office/drawing/2014/main" id="{CC529E1F-6B4F-55ED-1D4C-9A823B133B6C}"/>
+              </a:ext>
+            </a:extLst>
+          </p:cNvPr>
+          <p:cNvSpPr txBox="1"/>
+          <p:nvPr/>
+        </p:nvSpPr>
+        <p:spPr>
+          <a:xfrm>
+            <a:off x="0" y="5085184"/>
+            <a:ext cx="12192000" cy="584775"/>
+          </a:xfrm>
+          <a:prstGeom prst="rect">
+            <a:avLst/>
+          </a:prstGeom>
+          <a:noFill/>
+        </p:spPr>
+        <p:txBody>
+          <a:bodyPr wrap="square" rtlCol="0">
+            <a:spAutoFit/>
+          </a:bodyPr>
+          <a:lstStyle/>
+          <a:p>
+            <a:pPr algn="ctr"/>
+            <a:r>
+              <a:rPr lang="en-US" sz="3200" b="1" dirty="0">
+                <a:solidFill>
+                  <a:srgbClr val="660033"/>
+                </a:solidFill>
+                <a:latin typeface="Microsoft JhengHei" panose="020B0604030504040204" pitchFamily="34" charset="-120"/>
+                <a:ea typeface="Microsoft JhengHei" panose="020B0604030504040204" pitchFamily="34" charset="-120"/>
+              </a:rPr>
+              <a:t>( </a:t>
+            </a:r>
+            <a:r>
+              <a:rPr lang="zh-CN" altLang="en-US" sz="3200" b="1" dirty="0">
+                <a:solidFill>
+                  <a:srgbClr val="660033"/>
+                </a:solidFill>
+                <a:latin typeface="Microsoft JhengHei" panose="020B0604030504040204" pitchFamily="34" charset="-120"/>
+                <a:ea typeface="Microsoft JhengHei" panose="020B0604030504040204" pitchFamily="34" charset="-120"/>
+              </a:rPr>
+              <a:t>正歌</a:t>
+            </a:r>
+            <a:r>
+              <a:rPr lang="en-US" sz="3200" b="1" dirty="0">
+                <a:solidFill>
+                  <a:srgbClr val="660033"/>
+                </a:solidFill>
+                <a:latin typeface="Microsoft JhengHei" panose="020B0604030504040204" pitchFamily="34" charset="-120"/>
+                <a:ea typeface="Microsoft JhengHei" panose="020B0604030504040204" pitchFamily="34" charset="-120"/>
+              </a:rPr>
+              <a:t> )</a:t>
+            </a:r>
+            <a:endParaRPr lang="vi-VN" sz="3200" b="1" dirty="0">
               <a:solidFill>
                 <a:srgbClr val="660033"/>
               </a:solidFill>
-              <a:latin typeface="微軟正黑體" pitchFamily="34" charset="-120"/>
-              <a:ea typeface="微軟正黑體" pitchFamily="34" charset="-120"/>
+              <a:ea typeface="Microsoft JhengHei" panose="020B0604030504040204" pitchFamily="34" charset="-120"/>
             </a:endParaRPr>
           </a:p>
         </p:txBody>
@@ -3427,7 +3505,7 @@
                 <a:latin typeface="微軟正黑體" pitchFamily="34" charset="-120"/>
                 <a:ea typeface="微軟正黑體" pitchFamily="34" charset="-120"/>
               </a:rPr>
-              <a:t>袮</a:t>
+              <a:t>祢</a:t>
             </a:r>
             <a:r>
               <a:rPr lang="zh-TW" altLang="en-US" sz="6400" b="1" dirty="0">
@@ -3469,7 +3547,7 @@
                 <a:latin typeface="微軟正黑體" pitchFamily="34" charset="-120"/>
                 <a:ea typeface="微軟正黑體" pitchFamily="34" charset="-120"/>
               </a:rPr>
-              <a:t>袮</a:t>
+              <a:t>祢</a:t>
             </a:r>
             <a:r>
               <a:rPr lang="zh-TW" altLang="en-US" sz="6400" b="1" dirty="0">
@@ -3487,6 +3565,74 @@
               </a:solidFill>
               <a:latin typeface="微軟正黑體" pitchFamily="34" charset="-120"/>
               <a:ea typeface="微軟正黑體" pitchFamily="34" charset="-120"/>
+            </a:endParaRPr>
+          </a:p>
+        </p:txBody>
+      </p:sp>
+      <p:sp>
+        <p:nvSpPr>
+          <p:cNvPr id="2" name="TextBox 1">
+            <a:extLst>
+              <a:ext uri="{FF2B5EF4-FFF2-40B4-BE49-F238E27FC236}">
+                <a16:creationId xmlns:a16="http://schemas.microsoft.com/office/drawing/2014/main" id="{80D3B147-F180-3F3B-480D-0F1814A1953C}"/>
+              </a:ext>
+            </a:extLst>
+          </p:cNvPr>
+          <p:cNvSpPr txBox="1"/>
+          <p:nvPr/>
+        </p:nvSpPr>
+        <p:spPr>
+          <a:xfrm>
+            <a:off x="0" y="5085184"/>
+            <a:ext cx="12192000" cy="584775"/>
+          </a:xfrm>
+          <a:prstGeom prst="rect">
+            <a:avLst/>
+          </a:prstGeom>
+          <a:noFill/>
+        </p:spPr>
+        <p:txBody>
+          <a:bodyPr wrap="square" rtlCol="0">
+            <a:spAutoFit/>
+          </a:bodyPr>
+          <a:lstStyle/>
+          <a:p>
+            <a:pPr algn="ctr"/>
+            <a:r>
+              <a:rPr lang="en-US" sz="3200" b="1" dirty="0">
+                <a:solidFill>
+                  <a:srgbClr val="660033"/>
+                </a:solidFill>
+                <a:latin typeface="Microsoft JhengHei" panose="020B0604030504040204" pitchFamily="34" charset="-120"/>
+                <a:ea typeface="Microsoft JhengHei" panose="020B0604030504040204" pitchFamily="34" charset="-120"/>
+              </a:rPr>
+              <a:t>( </a:t>
+            </a:r>
+            <a:r>
+              <a:rPr lang="zh-CN" altLang="en-US" sz="3200" b="1" dirty="0">
+                <a:solidFill>
+                  <a:srgbClr val="660033"/>
+                </a:solidFill>
+                <a:latin typeface="Microsoft JhengHei" panose="020B0604030504040204" pitchFamily="34" charset="-120"/>
+                <a:ea typeface="Microsoft JhengHei" panose="020B0604030504040204" pitchFamily="34" charset="-120"/>
+              </a:rPr>
+              <a:t>正歌</a:t>
+            </a:r>
+            <a:r>
+              <a:rPr lang="en-US" sz="3200" b="1" dirty="0">
+                <a:solidFill>
+                  <a:srgbClr val="660033"/>
+                </a:solidFill>
+                <a:latin typeface="Microsoft JhengHei" panose="020B0604030504040204" pitchFamily="34" charset="-120"/>
+                <a:ea typeface="Microsoft JhengHei" panose="020B0604030504040204" pitchFamily="34" charset="-120"/>
+              </a:rPr>
+              <a:t> )</a:t>
+            </a:r>
+            <a:endParaRPr lang="vi-VN" sz="3200" b="1" dirty="0">
+              <a:solidFill>
+                <a:srgbClr val="660033"/>
+              </a:solidFill>
+              <a:ea typeface="Microsoft JhengHei" panose="020B0604030504040204" pitchFamily="34" charset="-120"/>
             </a:endParaRPr>
           </a:p>
         </p:txBody>
@@ -3564,7 +3710,7 @@
                 <a:latin typeface="微軟正黑體" pitchFamily="34" charset="-120"/>
                 <a:ea typeface="微軟正黑體" pitchFamily="34" charset="-120"/>
               </a:rPr>
-              <a:t>袮</a:t>
+              <a:t>祢</a:t>
             </a:r>
             <a:r>
               <a:rPr lang="zh-TW" altLang="en-US" sz="6400" b="1" dirty="0">
@@ -3598,12 +3744,73 @@
               </a:rPr>
               <a:t>我得自由  必見光</a:t>
             </a:r>
-            <a:endParaRPr lang="zh-TW" altLang="en-US" sz="6400" b="1" dirty="0">
+          </a:p>
+        </p:txBody>
+      </p:sp>
+      <p:sp>
+        <p:nvSpPr>
+          <p:cNvPr id="2" name="TextBox 1">
+            <a:extLst>
+              <a:ext uri="{FF2B5EF4-FFF2-40B4-BE49-F238E27FC236}">
+                <a16:creationId xmlns:a16="http://schemas.microsoft.com/office/drawing/2014/main" id="{63A7E005-B9FF-E2F5-164B-A9DA4F877447}"/>
+              </a:ext>
+            </a:extLst>
+          </p:cNvPr>
+          <p:cNvSpPr txBox="1"/>
+          <p:nvPr/>
+        </p:nvSpPr>
+        <p:spPr>
+          <a:xfrm>
+            <a:off x="0" y="5085184"/>
+            <a:ext cx="12192000" cy="584775"/>
+          </a:xfrm>
+          <a:prstGeom prst="rect">
+            <a:avLst/>
+          </a:prstGeom>
+          <a:noFill/>
+        </p:spPr>
+        <p:txBody>
+          <a:bodyPr wrap="square" rtlCol="0">
+            <a:spAutoFit/>
+          </a:bodyPr>
+          <a:lstStyle/>
+          <a:p>
+            <a:pPr algn="ctr"/>
+            <a:r>
+              <a:rPr lang="en-US" sz="3200" b="1" dirty="0">
+                <a:solidFill>
+                  <a:srgbClr val="660033"/>
+                </a:solidFill>
+                <a:latin typeface="Microsoft JhengHei" panose="020B0604030504040204" pitchFamily="34" charset="-120"/>
+                <a:ea typeface="Microsoft JhengHei" panose="020B0604030504040204" pitchFamily="34" charset="-120"/>
+              </a:rPr>
+              <a:t>( </a:t>
+            </a:r>
+            <a:r>
+              <a:rPr lang="zh-CN" altLang="en-US" sz="3200" b="1" dirty="0">
+                <a:solidFill>
+                  <a:srgbClr val="660033"/>
+                </a:solidFill>
+                <a:latin typeface="Microsoft JhengHei" panose="020B0604030504040204" pitchFamily="34" charset="-120"/>
+                <a:ea typeface="Microsoft JhengHei" panose="020B0604030504040204" pitchFamily="34" charset="-120"/>
+              </a:rPr>
+              <a:t>正歌</a:t>
+            </a:r>
+            <a:r>
+              <a:rPr lang="en-US" sz="3200" b="1" dirty="0">
+                <a:solidFill>
+                  <a:srgbClr val="660033"/>
+                </a:solidFill>
+                <a:latin typeface="Microsoft JhengHei" panose="020B0604030504040204" pitchFamily="34" charset="-120"/>
+                <a:ea typeface="Microsoft JhengHei" panose="020B0604030504040204" pitchFamily="34" charset="-120"/>
+              </a:rPr>
+              <a:t> )</a:t>
+            </a:r>
+            <a:endParaRPr lang="vi-VN" sz="3200" b="1" dirty="0">
               <a:solidFill>
                 <a:srgbClr val="660033"/>
               </a:solidFill>
-              <a:latin typeface="微軟正黑體" pitchFamily="34" charset="-120"/>
-              <a:ea typeface="微軟正黑體" pitchFamily="34" charset="-120"/>
+              <a:ea typeface="Microsoft JhengHei" panose="020B0604030504040204" pitchFamily="34" charset="-120"/>
             </a:endParaRPr>
           </a:p>
         </p:txBody>
@@ -3683,6 +3890,74 @@
           </a:p>
         </p:txBody>
       </p:sp>
+      <p:sp>
+        <p:nvSpPr>
+          <p:cNvPr id="2" name="TextBox 1">
+            <a:extLst>
+              <a:ext uri="{FF2B5EF4-FFF2-40B4-BE49-F238E27FC236}">
+                <a16:creationId xmlns:a16="http://schemas.microsoft.com/office/drawing/2014/main" id="{52FC66ED-0B67-CB92-0EC2-AF17D8F9BF7E}"/>
+              </a:ext>
+            </a:extLst>
+          </p:cNvPr>
+          <p:cNvSpPr txBox="1"/>
+          <p:nvPr/>
+        </p:nvSpPr>
+        <p:spPr>
+          <a:xfrm>
+            <a:off x="0" y="5085184"/>
+            <a:ext cx="12192000" cy="584775"/>
+          </a:xfrm>
+          <a:prstGeom prst="rect">
+            <a:avLst/>
+          </a:prstGeom>
+          <a:noFill/>
+        </p:spPr>
+        <p:txBody>
+          <a:bodyPr wrap="square" rtlCol="0">
+            <a:spAutoFit/>
+          </a:bodyPr>
+          <a:lstStyle/>
+          <a:p>
+            <a:pPr algn="ctr"/>
+            <a:r>
+              <a:rPr lang="en-US" sz="3200" b="1" dirty="0">
+                <a:solidFill>
+                  <a:srgbClr val="660033"/>
+                </a:solidFill>
+                <a:latin typeface="Microsoft JhengHei" panose="020B0604030504040204" pitchFamily="34" charset="-120"/>
+                <a:ea typeface="Microsoft JhengHei" panose="020B0604030504040204" pitchFamily="34" charset="-120"/>
+              </a:rPr>
+              <a:t>( </a:t>
+            </a:r>
+            <a:r>
+              <a:rPr lang="zh-CN" altLang="en-US" sz="3200" b="1" dirty="0">
+                <a:solidFill>
+                  <a:srgbClr val="660033"/>
+                </a:solidFill>
+                <a:latin typeface="Microsoft JhengHei" panose="020B0604030504040204" pitchFamily="34" charset="-120"/>
+                <a:ea typeface="Microsoft JhengHei" panose="020B0604030504040204" pitchFamily="34" charset="-120"/>
+              </a:rPr>
+              <a:t>副歌</a:t>
+            </a:r>
+            <a:r>
+              <a:rPr lang="en-US" sz="3200" b="1" dirty="0">
+                <a:solidFill>
+                  <a:srgbClr val="660033"/>
+                </a:solidFill>
+                <a:latin typeface="Microsoft JhengHei" panose="020B0604030504040204" pitchFamily="34" charset="-120"/>
+                <a:ea typeface="Microsoft JhengHei" panose="020B0604030504040204" pitchFamily="34" charset="-120"/>
+              </a:rPr>
+              <a:t> )</a:t>
+            </a:r>
+            <a:endParaRPr lang="vi-VN" sz="3200" b="1" dirty="0">
+              <a:solidFill>
+                <a:srgbClr val="660033"/>
+              </a:solidFill>
+              <a:ea typeface="Microsoft JhengHei" panose="020B0604030504040204" pitchFamily="34" charset="-120"/>
+            </a:endParaRPr>
+          </a:p>
+        </p:txBody>
+      </p:sp>
     </p:spTree>
     <p:extLst>
       <p:ext uri="{BB962C8B-B14F-4D97-AF65-F5344CB8AC3E}">
@@ -3756,7 +4031,7 @@
                 <a:latin typeface="微軟正黑體" pitchFamily="34" charset="-120"/>
                 <a:ea typeface="微軟正黑體" pitchFamily="34" charset="-120"/>
               </a:rPr>
-              <a:t>袮</a:t>
+              <a:t>祢</a:t>
             </a:r>
             <a:r>
               <a:rPr lang="zh-TW" altLang="en-US" sz="6400" b="1" dirty="0">
@@ -3796,6 +4071,74 @@
               </a:solidFill>
               <a:latin typeface="微軟正黑體" pitchFamily="34" charset="-120"/>
               <a:ea typeface="微軟正黑體" pitchFamily="34" charset="-120"/>
+            </a:endParaRPr>
+          </a:p>
+        </p:txBody>
+      </p:sp>
+      <p:sp>
+        <p:nvSpPr>
+          <p:cNvPr id="2" name="TextBox 1">
+            <a:extLst>
+              <a:ext uri="{FF2B5EF4-FFF2-40B4-BE49-F238E27FC236}">
+                <a16:creationId xmlns:a16="http://schemas.microsoft.com/office/drawing/2014/main" id="{950A8D58-BCA4-7D16-1D50-2F7256A618E1}"/>
+              </a:ext>
+            </a:extLst>
+          </p:cNvPr>
+          <p:cNvSpPr txBox="1"/>
+          <p:nvPr/>
+        </p:nvSpPr>
+        <p:spPr>
+          <a:xfrm>
+            <a:off x="0" y="5085184"/>
+            <a:ext cx="12192000" cy="584775"/>
+          </a:xfrm>
+          <a:prstGeom prst="rect">
+            <a:avLst/>
+          </a:prstGeom>
+          <a:noFill/>
+        </p:spPr>
+        <p:txBody>
+          <a:bodyPr wrap="square" rtlCol="0">
+            <a:spAutoFit/>
+          </a:bodyPr>
+          <a:lstStyle/>
+          <a:p>
+            <a:pPr algn="ctr"/>
+            <a:r>
+              <a:rPr lang="en-US" sz="3200" b="1" dirty="0">
+                <a:solidFill>
+                  <a:srgbClr val="660033"/>
+                </a:solidFill>
+                <a:latin typeface="Microsoft JhengHei" panose="020B0604030504040204" pitchFamily="34" charset="-120"/>
+                <a:ea typeface="Microsoft JhengHei" panose="020B0604030504040204" pitchFamily="34" charset="-120"/>
+              </a:rPr>
+              <a:t>( </a:t>
+            </a:r>
+            <a:r>
+              <a:rPr lang="zh-CN" altLang="en-US" sz="3200" b="1" dirty="0">
+                <a:solidFill>
+                  <a:srgbClr val="660033"/>
+                </a:solidFill>
+                <a:latin typeface="Microsoft JhengHei" panose="020B0604030504040204" pitchFamily="34" charset="-120"/>
+                <a:ea typeface="Microsoft JhengHei" panose="020B0604030504040204" pitchFamily="34" charset="-120"/>
+              </a:rPr>
+              <a:t>副歌</a:t>
+            </a:r>
+            <a:r>
+              <a:rPr lang="en-US" sz="3200" b="1" dirty="0">
+                <a:solidFill>
+                  <a:srgbClr val="660033"/>
+                </a:solidFill>
+                <a:latin typeface="Microsoft JhengHei" panose="020B0604030504040204" pitchFamily="34" charset="-120"/>
+                <a:ea typeface="Microsoft JhengHei" panose="020B0604030504040204" pitchFamily="34" charset="-120"/>
+              </a:rPr>
+              <a:t> )</a:t>
+            </a:r>
+            <a:endParaRPr lang="vi-VN" sz="3200" b="1" dirty="0">
+              <a:solidFill>
+                <a:srgbClr val="660033"/>
+              </a:solidFill>
+              <a:ea typeface="Microsoft JhengHei" panose="020B0604030504040204" pitchFamily="34" charset="-120"/>
             </a:endParaRPr>
           </a:p>
         </p:txBody>
@@ -3875,6 +4218,74 @@
           </a:p>
         </p:txBody>
       </p:sp>
+      <p:sp>
+        <p:nvSpPr>
+          <p:cNvPr id="2" name="TextBox 1">
+            <a:extLst>
+              <a:ext uri="{FF2B5EF4-FFF2-40B4-BE49-F238E27FC236}">
+                <a16:creationId xmlns:a16="http://schemas.microsoft.com/office/drawing/2014/main" id="{20DE09EF-6297-F8C1-EB93-71E2D09C0DB4}"/>
+              </a:ext>
+            </a:extLst>
+          </p:cNvPr>
+          <p:cNvSpPr txBox="1"/>
+          <p:nvPr/>
+        </p:nvSpPr>
+        <p:spPr>
+          <a:xfrm>
+            <a:off x="0" y="5085184"/>
+            <a:ext cx="12192000" cy="584775"/>
+          </a:xfrm>
+          <a:prstGeom prst="rect">
+            <a:avLst/>
+          </a:prstGeom>
+          <a:noFill/>
+        </p:spPr>
+        <p:txBody>
+          <a:bodyPr wrap="square" rtlCol="0">
+            <a:spAutoFit/>
+          </a:bodyPr>
+          <a:lstStyle/>
+          <a:p>
+            <a:pPr algn="ctr"/>
+            <a:r>
+              <a:rPr lang="en-US" sz="3200" b="1" dirty="0">
+                <a:solidFill>
+                  <a:srgbClr val="660033"/>
+                </a:solidFill>
+                <a:latin typeface="Microsoft JhengHei" panose="020B0604030504040204" pitchFamily="34" charset="-120"/>
+                <a:ea typeface="Microsoft JhengHei" panose="020B0604030504040204" pitchFamily="34" charset="-120"/>
+              </a:rPr>
+              <a:t>( </a:t>
+            </a:r>
+            <a:r>
+              <a:rPr lang="zh-CN" altLang="en-US" sz="3200" b="1" dirty="0">
+                <a:solidFill>
+                  <a:srgbClr val="660033"/>
+                </a:solidFill>
+                <a:latin typeface="Microsoft JhengHei" panose="020B0604030504040204" pitchFamily="34" charset="-120"/>
+                <a:ea typeface="Microsoft JhengHei" panose="020B0604030504040204" pitchFamily="34" charset="-120"/>
+              </a:rPr>
+              <a:t>副歌</a:t>
+            </a:r>
+            <a:r>
+              <a:rPr lang="en-US" sz="3200" b="1" dirty="0">
+                <a:solidFill>
+                  <a:srgbClr val="660033"/>
+                </a:solidFill>
+                <a:latin typeface="Microsoft JhengHei" panose="020B0604030504040204" pitchFamily="34" charset="-120"/>
+                <a:ea typeface="Microsoft JhengHei" panose="020B0604030504040204" pitchFamily="34" charset="-120"/>
+              </a:rPr>
+              <a:t> )</a:t>
+            </a:r>
+            <a:endParaRPr lang="vi-VN" sz="3200" b="1" dirty="0">
+              <a:solidFill>
+                <a:srgbClr val="660033"/>
+              </a:solidFill>
+              <a:ea typeface="Microsoft JhengHei" panose="020B0604030504040204" pitchFamily="34" charset="-120"/>
+            </a:endParaRPr>
+          </a:p>
+        </p:txBody>
+      </p:sp>
     </p:spTree>
     <p:extLst>
       <p:ext uri="{BB962C8B-B14F-4D97-AF65-F5344CB8AC3E}">
@@ -3948,7 +4359,7 @@
                 <a:latin typeface="微軟正黑體" pitchFamily="34" charset="-120"/>
                 <a:ea typeface="微軟正黑體" pitchFamily="34" charset="-120"/>
               </a:rPr>
-              <a:t>袮</a:t>
+              <a:t>祢</a:t>
             </a:r>
             <a:r>
               <a:rPr lang="zh-TW" altLang="en-US" sz="6400" b="1" dirty="0">
@@ -3988,6 +4399,74 @@
               </a:solidFill>
               <a:latin typeface="微軟正黑體" pitchFamily="34" charset="-120"/>
               <a:ea typeface="微軟正黑體" pitchFamily="34" charset="-120"/>
+            </a:endParaRPr>
+          </a:p>
+        </p:txBody>
+      </p:sp>
+      <p:sp>
+        <p:nvSpPr>
+          <p:cNvPr id="2" name="TextBox 1">
+            <a:extLst>
+              <a:ext uri="{FF2B5EF4-FFF2-40B4-BE49-F238E27FC236}">
+                <a16:creationId xmlns:a16="http://schemas.microsoft.com/office/drawing/2014/main" id="{F999EAB1-E721-A75F-5C9A-45781027DE5D}"/>
+              </a:ext>
+            </a:extLst>
+          </p:cNvPr>
+          <p:cNvSpPr txBox="1"/>
+          <p:nvPr/>
+        </p:nvSpPr>
+        <p:spPr>
+          <a:xfrm>
+            <a:off x="0" y="5085184"/>
+            <a:ext cx="12192000" cy="584775"/>
+          </a:xfrm>
+          <a:prstGeom prst="rect">
+            <a:avLst/>
+          </a:prstGeom>
+          <a:noFill/>
+        </p:spPr>
+        <p:txBody>
+          <a:bodyPr wrap="square" rtlCol="0">
+            <a:spAutoFit/>
+          </a:bodyPr>
+          <a:lstStyle/>
+          <a:p>
+            <a:pPr algn="ctr"/>
+            <a:r>
+              <a:rPr lang="en-US" sz="3200" b="1" dirty="0">
+                <a:solidFill>
+                  <a:srgbClr val="660033"/>
+                </a:solidFill>
+                <a:latin typeface="Microsoft JhengHei" panose="020B0604030504040204" pitchFamily="34" charset="-120"/>
+                <a:ea typeface="Microsoft JhengHei" panose="020B0604030504040204" pitchFamily="34" charset="-120"/>
+              </a:rPr>
+              <a:t>( </a:t>
+            </a:r>
+            <a:r>
+              <a:rPr lang="zh-CN" altLang="en-US" sz="3200" b="1" dirty="0">
+                <a:solidFill>
+                  <a:srgbClr val="660033"/>
+                </a:solidFill>
+                <a:latin typeface="Microsoft JhengHei" panose="020B0604030504040204" pitchFamily="34" charset="-120"/>
+                <a:ea typeface="Microsoft JhengHei" panose="020B0604030504040204" pitchFamily="34" charset="-120"/>
+              </a:rPr>
+              <a:t>副歌</a:t>
+            </a:r>
+            <a:r>
+              <a:rPr lang="en-US" sz="3200" b="1" dirty="0">
+                <a:solidFill>
+                  <a:srgbClr val="660033"/>
+                </a:solidFill>
+                <a:latin typeface="Microsoft JhengHei" panose="020B0604030504040204" pitchFamily="34" charset="-120"/>
+                <a:ea typeface="Microsoft JhengHei" panose="020B0604030504040204" pitchFamily="34" charset="-120"/>
+              </a:rPr>
+              <a:t> )</a:t>
+            </a:r>
+            <a:endParaRPr lang="vi-VN" sz="3200" b="1" dirty="0">
+              <a:solidFill>
+                <a:srgbClr val="660033"/>
+              </a:solidFill>
+              <a:ea typeface="Microsoft JhengHei" panose="020B0604030504040204" pitchFamily="34" charset="-120"/>
             </a:endParaRPr>
           </a:p>
         </p:txBody>
